--- a/presentation/slides.pptx
+++ b/presentation/slides.pptx
@@ -5736,34 +5736,34 @@
               </a:defRPr>
             </a:pPr>
             <a:r>
-              <a:t>• Tirth Gondaliya (Team Lead)</a:t>
+              <a:t>• Dax Gondaliya (Team Lead)</a:t>
             </a:r>
             <a:br/>
             <a:r>
-              <a:t>  Architect, Backend Systems, Arrhenius Kinetics &amp; AI Integration</a:t>
+              <a:t>  Project Architecture, Strategy &amp; Systems Coordination</a:t>
             </a:r>
             <a:br/>
             <a:br/>
             <a:r>
-              <a:t>• Alex Mercer</a:t>
+              <a:t>• Tirth Gondaliya</a:t>
             </a:r>
             <a:br/>
             <a:r>
-              <a:t>  Frontend Engineering, Leaflet Geospatial UI &amp; Data Visualization</a:t>
+              <a:t>  Backend Engineering, Arrhenius Kinetics &amp; AI Integration</a:t>
             </a:r>
             <a:br/>
             <a:br/>
             <a:r>
-              <a:t>• Priya Sharma</a:t>
+              <a:t>• Keval Jogani</a:t>
             </a:r>
             <a:br/>
             <a:r>
-              <a:t>  IBM watsonx.ai Prompt Engineering &amp; Regulatory Compliance (FDA/WHO)</a:t>
+              <a:t>  Frontend Engineering, Leaflet Geospatial UI &amp; Data Visualization</a:t>
             </a:r>
             <a:br/>
             <a:br/>
             <a:r>
-              <a:t>• David Kim</a:t>
+              <a:t>• Hardik Thummar</a:t>
             </a:r>
             <a:br/>
             <a:r>
